--- a/Dokumentation/Anleitung/Layout_beschfriftet.pptx
+++ b/Dokumentation/Anleitung/Layout_beschfriftet.pptx
@@ -104,6 +104,11 @@
       </a:defRPr>
     </a:lvl9pPr>
   </p:defaultTextStyle>
+  <p:extLst>
+    <p:ext uri="{EFAFB233-063F-42B5-8137-9DF3F51BA10A}">
+      <p15:sldGuideLst xmlns:p15="http://schemas.microsoft.com/office/powerpoint/2012/main"/>
+    </p:ext>
+  </p:extLst>
 </p:presentation>
 </file>
 
@@ -238,7 +243,7 @@
           <a:p>
             <a:fld id="{1E836003-6FA7-40A3-9CB6-2C61D4974766}" type="datetimeFigureOut">
               <a:rPr lang="de-DE" smtClean="0"/>
-              <a:t>16.09.2026</a:t>
+              <a:t>17.09.2026</a:t>
             </a:fld>
             <a:endParaRPr lang="de-DE"/>
           </a:p>
@@ -408,7 +413,7 @@
           <a:p>
             <a:fld id="{1E836003-6FA7-40A3-9CB6-2C61D4974766}" type="datetimeFigureOut">
               <a:rPr lang="de-DE" smtClean="0"/>
-              <a:t>16.09.2026</a:t>
+              <a:t>17.09.2026</a:t>
             </a:fld>
             <a:endParaRPr lang="de-DE"/>
           </a:p>
@@ -588,7 +593,7 @@
           <a:p>
             <a:fld id="{1E836003-6FA7-40A3-9CB6-2C61D4974766}" type="datetimeFigureOut">
               <a:rPr lang="de-DE" smtClean="0"/>
-              <a:t>16.09.2026</a:t>
+              <a:t>17.09.2026</a:t>
             </a:fld>
             <a:endParaRPr lang="de-DE"/>
           </a:p>
@@ -758,7 +763,7 @@
           <a:p>
             <a:fld id="{1E836003-6FA7-40A3-9CB6-2C61D4974766}" type="datetimeFigureOut">
               <a:rPr lang="de-DE" smtClean="0"/>
-              <a:t>16.09.2026</a:t>
+              <a:t>17.09.2026</a:t>
             </a:fld>
             <a:endParaRPr lang="de-DE"/>
           </a:p>
@@ -1004,7 +1009,7 @@
           <a:p>
             <a:fld id="{1E836003-6FA7-40A3-9CB6-2C61D4974766}" type="datetimeFigureOut">
               <a:rPr lang="de-DE" smtClean="0"/>
-              <a:t>16.09.2026</a:t>
+              <a:t>17.09.2026</a:t>
             </a:fld>
             <a:endParaRPr lang="de-DE"/>
           </a:p>
@@ -1236,7 +1241,7 @@
           <a:p>
             <a:fld id="{1E836003-6FA7-40A3-9CB6-2C61D4974766}" type="datetimeFigureOut">
               <a:rPr lang="de-DE" smtClean="0"/>
-              <a:t>16.09.2026</a:t>
+              <a:t>17.09.2026</a:t>
             </a:fld>
             <a:endParaRPr lang="de-DE"/>
           </a:p>
@@ -1603,7 +1608,7 @@
           <a:p>
             <a:fld id="{1E836003-6FA7-40A3-9CB6-2C61D4974766}" type="datetimeFigureOut">
               <a:rPr lang="de-DE" smtClean="0"/>
-              <a:t>16.09.2026</a:t>
+              <a:t>17.09.2026</a:t>
             </a:fld>
             <a:endParaRPr lang="de-DE"/>
           </a:p>
@@ -1721,7 +1726,7 @@
           <a:p>
             <a:fld id="{1E836003-6FA7-40A3-9CB6-2C61D4974766}" type="datetimeFigureOut">
               <a:rPr lang="de-DE" smtClean="0"/>
-              <a:t>16.09.2026</a:t>
+              <a:t>17.09.2026</a:t>
             </a:fld>
             <a:endParaRPr lang="de-DE"/>
           </a:p>
@@ -1816,7 +1821,7 @@
           <a:p>
             <a:fld id="{1E836003-6FA7-40A3-9CB6-2C61D4974766}" type="datetimeFigureOut">
               <a:rPr lang="de-DE" smtClean="0"/>
-              <a:t>16.09.2026</a:t>
+              <a:t>17.09.2026</a:t>
             </a:fld>
             <a:endParaRPr lang="de-DE"/>
           </a:p>
@@ -2093,7 +2098,7 @@
           <a:p>
             <a:fld id="{1E836003-6FA7-40A3-9CB6-2C61D4974766}" type="datetimeFigureOut">
               <a:rPr lang="de-DE" smtClean="0"/>
-              <a:t>16.09.2026</a:t>
+              <a:t>17.09.2026</a:t>
             </a:fld>
             <a:endParaRPr lang="de-DE"/>
           </a:p>
@@ -2350,7 +2355,7 @@
           <a:p>
             <a:fld id="{1E836003-6FA7-40A3-9CB6-2C61D4974766}" type="datetimeFigureOut">
               <a:rPr lang="de-DE" smtClean="0"/>
-              <a:t>16.09.2026</a:t>
+              <a:t>17.09.2026</a:t>
             </a:fld>
             <a:endParaRPr lang="de-DE"/>
           </a:p>
@@ -2563,7 +2568,7 @@
           <a:p>
             <a:fld id="{1E836003-6FA7-40A3-9CB6-2C61D4974766}" type="datetimeFigureOut">
               <a:rPr lang="de-DE" smtClean="0"/>
-              <a:t>16.09.2026</a:t>
+              <a:t>17.09.2026</a:t>
             </a:fld>
             <a:endParaRPr lang="de-DE"/>
           </a:p>
@@ -3422,7 +3427,7 @@
             <a:pPr algn="ctr"/>
             <a:r>
               <a:rPr lang="de-DE" dirty="0"/>
-              <a:t>35-70V</a:t>
+              <a:t>36-75V</a:t>
             </a:r>
           </a:p>
         </p:txBody>
@@ -3884,13 +3889,13 @@
         </p:nvSpPr>
         <p:spPr>
           <a:xfrm>
-            <a:off x="2352954" y="3619845"/>
-            <a:ext cx="928362" cy="314960"/>
+            <a:off x="2352954" y="3575870"/>
+            <a:ext cx="1155286" cy="358935"/>
           </a:xfrm>
           <a:prstGeom prst="wedgeRoundRectCallout">
             <a:avLst>
-              <a:gd name="adj1" fmla="val 61453"/>
-              <a:gd name="adj2" fmla="val 101735"/>
+              <a:gd name="adj1" fmla="val 36269"/>
+              <a:gd name="adj2" fmla="val 92085"/>
               <a:gd name="adj3" fmla="val 16667"/>
             </a:avLst>
           </a:prstGeom>
@@ -3917,14 +3922,14 @@
           <a:p>
             <a:pPr algn="ctr"/>
             <a:r>
-              <a:rPr lang="de-DE" sz="800" dirty="0"/>
+              <a:rPr lang="de-DE" sz="1100" dirty="0"/>
               <a:t>Strommessung</a:t>
             </a:r>
             <a:br>
-              <a:rPr lang="de-DE" sz="800" dirty="0"/>
+              <a:rPr lang="de-DE" sz="1100" dirty="0"/>
             </a:br>
             <a:r>
-              <a:rPr lang="de-DE" sz="800" dirty="0"/>
+              <a:rPr lang="de-DE" sz="1100" dirty="0"/>
               <a:t>1V ≙ 1A</a:t>
             </a:r>
           </a:p>
